--- a/Documents/M2_E3_FERsystem.pptx
+++ b/Documents/M2_E3_FERsystem.pptx
@@ -13234,7 +13234,7 @@
             <a:fld id="{C17AAE40-EC51-40B7-BEE9-A309CD065EBB}" type="datetimeFigureOut">
               <a:rPr lang="en-US" smtClean="0"/>
               <a:pPr/>
-              <a:t>4/30/2026</a:t>
+              <a:t>5/3/2026</a:t>
             </a:fld>
             <a:endParaRPr lang="en-US"/>
           </a:p>
@@ -13796,7 +13796,7 @@
             <a:fld id="{1B05FC8C-5F84-40FC-9DB3-36FAAD4852D4}" type="datetime1">
               <a:rPr lang="en-US" smtClean="0"/>
               <a:pPr/>
-              <a:t>4/30/2026</a:t>
+              <a:t>5/3/2026</a:t>
             </a:fld>
             <a:endParaRPr lang="en-US"/>
           </a:p>
@@ -13988,7 +13988,7 @@
             <a:fld id="{CE114A09-1599-4196-9A51-AAA25C326068}" type="datetime1">
               <a:rPr lang="en-US" smtClean="0"/>
               <a:pPr/>
-              <a:t>4/30/2026</a:t>
+              <a:t>5/3/2026</a:t>
             </a:fld>
             <a:endParaRPr lang="en-US"/>
           </a:p>
@@ -14174,7 +14174,7 @@
             <a:fld id="{691CC3B7-7831-48B7-B16A-CE5D505072FA}" type="datetime1">
               <a:rPr lang="en-US" smtClean="0"/>
               <a:pPr/>
-              <a:t>4/30/2026</a:t>
+              <a:t>5/3/2026</a:t>
             </a:fld>
             <a:endParaRPr lang="en-US"/>
           </a:p>
@@ -14446,7 +14446,7 @@
             <a:fld id="{D19D3B58-94F3-49B3-A594-72F91CE4F73B}" type="datetime1">
               <a:rPr lang="en-US" smtClean="0"/>
               <a:pPr/>
-              <a:t>4/30/2026</a:t>
+              <a:t>5/3/2026</a:t>
             </a:fld>
             <a:endParaRPr lang="en-US"/>
           </a:p>
@@ -14863,7 +14863,7 @@
             <a:fld id="{048A83B2-5A21-40A6-8CC9-AECD50B431A2}" type="datetime1">
               <a:rPr lang="en-US" smtClean="0"/>
               <a:pPr/>
-              <a:t>4/30/2026</a:t>
+              <a:t>5/3/2026</a:t>
             </a:fld>
             <a:endParaRPr lang="en-US"/>
           </a:p>
@@ -15106,7 +15106,7 @@
             <a:fld id="{C894BB91-8EDE-443C-934F-82BCDBE84739}" type="datetime1">
               <a:rPr lang="en-US" smtClean="0"/>
               <a:pPr/>
-              <a:t>4/30/2026</a:t>
+              <a:t>5/3/2026</a:t>
             </a:fld>
             <a:endParaRPr lang="en-US"/>
           </a:p>
@@ -15343,7 +15343,7 @@
             <a:fld id="{0402FC8E-0AD3-46CC-B4A8-9E21B2D784F3}" type="datetime1">
               <a:rPr lang="en-US" smtClean="0"/>
               <a:pPr/>
-              <a:t>4/30/2026</a:t>
+              <a:t>5/3/2026</a:t>
             </a:fld>
             <a:endParaRPr lang="en-US"/>
           </a:p>
@@ -15539,7 +15539,7 @@
             <a:fld id="{38ED778E-50AD-4331-9E18-57BE71B7F4DA}" type="datetime1">
               <a:rPr lang="en-US" smtClean="0"/>
               <a:pPr/>
-              <a:t>4/30/2026</a:t>
+              <a:t>5/3/2026</a:t>
             </a:fld>
             <a:endParaRPr lang="en-US"/>
           </a:p>
@@ -15639,7 +15639,7 @@
             <a:fld id="{9D8AFDFE-A229-48E6-90CD-7598AE829545}" type="datetime1">
               <a:rPr lang="en-US" smtClean="0"/>
               <a:pPr/>
-              <a:t>4/30/2026</a:t>
+              <a:t>5/3/2026</a:t>
             </a:fld>
             <a:endParaRPr lang="en-US"/>
           </a:p>
@@ -15776,7 +15776,7 @@
             <a:fld id="{EEEAFCCE-38D0-4CB1-84AE-92A62C822E7F}" type="datetime1">
               <a:rPr lang="en-US" smtClean="0"/>
               <a:pPr/>
-              <a:t>4/30/2026</a:t>
+              <a:t>5/3/2026</a:t>
             </a:fld>
             <a:endParaRPr lang="en-US"/>
           </a:p>
@@ -16295,7 +16295,7 @@
             <a:fld id="{F64D0CD7-4FA3-45CB-B70F-EA07A191669C}" type="datetime1">
               <a:rPr lang="en-US" smtClean="0"/>
               <a:pPr/>
-              <a:t>4/30/2026</a:t>
+              <a:t>5/3/2026</a:t>
             </a:fld>
             <a:endParaRPr lang="en-US"/>
           </a:p>
@@ -16556,7 +16556,7 @@
             <a:fld id="{76F79B87-CAF0-4157-B382-432074DEE2A5}" type="datetime1">
               <a:rPr lang="en-US" smtClean="0"/>
               <a:pPr/>
-              <a:t>4/30/2026</a:t>
+              <a:t>5/3/2026</a:t>
             </a:fld>
             <a:endParaRPr lang="en-US" dirty="0"/>
           </a:p>
@@ -17875,7 +17875,7 @@
           <a:p>
             <a:r>
               <a:rPr lang="en-US" b="1" u="sng" dirty="0"/>
-              <a:t>Work to be Done</a:t>
+              <a:t>Further Scope</a:t>
             </a:r>
           </a:p>
         </p:txBody>
@@ -17962,7 +17962,7 @@
           <a:p>
             <a:r>
               <a:rPr lang="en-US" dirty="0"/>
-              <a:t>Implement real-time facial emotion detection using OpenCV for webcam-based input and live predictions.</a:t>
+              <a:t>Improve real-time facial emotion detection using OpenCV for webcam-based input and live predictions.</a:t>
             </a:r>
           </a:p>
           <a:p>
@@ -18298,12 +18298,14 @@
         </p:nvSpPr>
         <p:spPr/>
         <p:txBody>
-          <a:bodyPr/>
+          <a:bodyPr>
+            <a:normAutofit/>
+          </a:bodyPr>
           <a:lstStyle/>
           <a:p>
             <a:r>
               <a:rPr lang="en-US" b="1" u="sng" dirty="0"/>
-              <a:t>Classification Result (till now)</a:t>
+              <a:t>Classification Result </a:t>
             </a:r>
           </a:p>
         </p:txBody>
